--- a/Modul Minna 1/Bab 24/49. Minna 1 Tata Bahasa Bab 24 - Slide.pptx
+++ b/Modul Minna 1/Bab 24/49. Minna 1 Tata Bahasa Bab 24 - Slide.pptx
@@ -1450,7 +1450,7 @@
               <a:buNone/>
             </a:pPr>
             <a:r>
-              <a:rPr lang="en-US" sz="4400" b="1" dirty="0">
+              <a:rPr lang="en-US" sz="4100" b="1" dirty="0">
                 <a:solidFill>
                   <a:srgbClr val="FFFFFF"/>
                 </a:solidFill>
@@ -1460,7 +1460,7 @@
               </a:rPr>
               <a:t>Memberi &amp; Menerima Jasa</a:t>
             </a:r>
-            <a:endParaRPr lang="en-US" sz="4400" dirty="0"/>
+            <a:endParaRPr lang="en-US" sz="4100" dirty="0"/>
           </a:p>
         </p:txBody>
       </p:sp>
@@ -2809,7 +2809,7 @@
                 <a:ea typeface="Arial" pitchFamily="34" charset="-122"/>
                 <a:cs typeface="Arial" pitchFamily="34" charset="-120"/>
               </a:rPr>
-              <a:t>Sdr. Andi mengantar saya ke stasiun.</a:t>
+              <a:t>Andi mengantar saya ke stasiun.</a:t>
             </a:r>
             <a:endParaRPr lang="en-US" sz="950" dirty="0"/>
           </a:p>
